--- a/02 Osnove Informacione Bezbednosti/02 Prezentacije/PPTX/03_Politike_konfiguracija_i_vidljivost.pptx
+++ b/02 Osnove Informacione Bezbednosti/02 Prezentacije/PPTX/03_Politike_konfiguracija_i_vidljivost.pptx
@@ -7420,7 +7420,7 @@
                 <a:ea typeface="Aptos"/>
                 <a:cs typeface="Aptos"/>
               </a:rPr>
-              <a:t>Код раздваја верзионисано правило, конфигурационе вредности и механизам примене.</a:t>
+              <a:t>Референтна вредност је правило, тренутна вредност је стање, а контрола их пореди.</a:t>
             </a:r>
           </a:p>
         </p:txBody>
@@ -7442,7 +7442,7 @@
         <p:spPr>
           <a:xfrm xmlns:a="http://schemas.openxmlformats.org/drawingml/2006/main">
             <a:off x="666750" y="2095500"/>
-            <a:ext cx="6858000" cy="2038350"/>
+            <a:ext cx="6858000" cy="2812550"/>
           </a:xfrm>
           <a:prstGeom xmlns:a="http://schemas.openxmlformats.org/drawingml/2006/main" prst="roundRect">
             <a:avLst>
@@ -7624,7 +7624,7 @@
           <a:p xmlns:a="http://schemas.openxmlformats.org/drawingml/2006/main">
             <a:pPr algn="r">
               <a:lnSpc>
-                <a:spcPct val="100000"/>
+                <a:spcPts val="1300"/>
               </a:lnSpc>
               <a:buNone/>
               <a:defRPr sz="975" b="0">
@@ -7651,7 +7651,7 @@
           <a:p xmlns:a="http://schemas.openxmlformats.org/drawingml/2006/main">
             <a:pPr algn="r">
               <a:lnSpc>
-                <a:spcPct val="100000"/>
+                <a:spcPts val="1300"/>
               </a:lnSpc>
               <a:buNone/>
               <a:defRPr sz="975" b="0">
@@ -7678,7 +7678,7 @@
           <a:p xmlns:a="http://schemas.openxmlformats.org/drawingml/2006/main">
             <a:pPr algn="r">
               <a:lnSpc>
-                <a:spcPct val="100000"/>
+                <a:spcPts val="1300"/>
               </a:lnSpc>
               <a:buNone/>
               <a:defRPr sz="975" b="0">
@@ -7705,7 +7705,7 @@
           <a:p xmlns:a="http://schemas.openxmlformats.org/drawingml/2006/main">
             <a:pPr algn="r">
               <a:lnSpc>
-                <a:spcPct val="100000"/>
+                <a:spcPts val="1300"/>
               </a:lnSpc>
               <a:buNone/>
               <a:defRPr sz="975" b="0">
@@ -7732,7 +7732,7 @@
           <a:p xmlns:a="http://schemas.openxmlformats.org/drawingml/2006/main">
             <a:pPr algn="r">
               <a:lnSpc>
-                <a:spcPct val="100000"/>
+                <a:spcPts val="1300"/>
               </a:lnSpc>
               <a:buNone/>
               <a:defRPr sz="975" b="0">
@@ -7759,7 +7759,7 @@
           <a:p xmlns:a="http://schemas.openxmlformats.org/drawingml/2006/main">
             <a:pPr algn="r">
               <a:lnSpc>
-                <a:spcPct val="100000"/>
+                <a:spcPts val="1300"/>
               </a:lnSpc>
               <a:buNone/>
               <a:defRPr sz="975" b="0">
@@ -7786,7 +7786,7 @@
           <a:p xmlns:a="http://schemas.openxmlformats.org/drawingml/2006/main">
             <a:pPr algn="r">
               <a:lnSpc>
-                <a:spcPct val="100000"/>
+                <a:spcPts val="1300"/>
               </a:lnSpc>
               <a:buNone/>
               <a:defRPr sz="975" b="0">
@@ -7813,7 +7813,7 @@
           <a:p xmlns:a="http://schemas.openxmlformats.org/drawingml/2006/main">
             <a:pPr algn="r">
               <a:lnSpc>
-                <a:spcPct val="100000"/>
+                <a:spcPts val="1300"/>
               </a:lnSpc>
               <a:buNone/>
               <a:defRPr sz="975" b="0">
@@ -7837,6 +7837,141 @@
               <a:t>8</a:t>
             </a:r>
           </a:p>
+          <a:p xmlns:a="http://schemas.openxmlformats.org/drawingml/2006/main">
+            <a:pPr algn="r">
+              <a:lnSpc>
+                <a:spcPts val="1300"/>
+              </a:lnSpc>
+              <a:buNone/>
+              <a:defRPr sz="975" b="0">
+                <a:solidFill>
+                  <a:srgbClr val="8792A6"/>
+                </a:solidFill>
+                <a:latin typeface="Consolas"/>
+                <a:ea typeface="Consolas"/>
+                <a:cs typeface="Consolas"/>
+              </a:defRPr>
+            </a:pPr>
+            <a:r>
+              <a:rPr sz="975" b="0">
+                <a:solidFill>
+                  <a:srgbClr val="8792A6"/>
+                </a:solidFill>
+                <a:latin typeface="Consolas"/>
+                <a:ea typeface="Consolas"/>
+                <a:cs typeface="Consolas"/>
+              </a:rPr>
+              <a:t>9</a:t>
+            </a:r>
+          </a:p>
+          <a:p xmlns:a="http://schemas.openxmlformats.org/drawingml/2006/main">
+            <a:pPr algn="r">
+              <a:lnSpc>
+                <a:spcPts val="1300"/>
+              </a:lnSpc>
+              <a:buNone/>
+              <a:defRPr sz="975" b="0">
+                <a:solidFill>
+                  <a:srgbClr val="8792A6"/>
+                </a:solidFill>
+                <a:latin typeface="Consolas"/>
+                <a:ea typeface="Consolas"/>
+                <a:cs typeface="Consolas"/>
+              </a:defRPr>
+            </a:pPr>
+            <a:r>
+              <a:rPr sz="975" b="0">
+                <a:solidFill>
+                  <a:srgbClr val="8792A6"/>
+                </a:solidFill>
+                <a:latin typeface="Consolas"/>
+                <a:ea typeface="Consolas"/>
+                <a:cs typeface="Consolas"/>
+              </a:rPr>
+              <a:t>10</a:t>
+            </a:r>
+          </a:p>
+          <a:p xmlns:a="http://schemas.openxmlformats.org/drawingml/2006/main">
+            <a:pPr algn="r">
+              <a:lnSpc>
+                <a:spcPts val="1300"/>
+              </a:lnSpc>
+              <a:buNone/>
+              <a:defRPr sz="975" b="0">
+                <a:solidFill>
+                  <a:srgbClr val="8792A6"/>
+                </a:solidFill>
+                <a:latin typeface="Consolas"/>
+                <a:ea typeface="Consolas"/>
+                <a:cs typeface="Consolas"/>
+              </a:defRPr>
+            </a:pPr>
+            <a:r>
+              <a:rPr sz="975" b="0">
+                <a:solidFill>
+                  <a:srgbClr val="8792A6"/>
+                </a:solidFill>
+                <a:latin typeface="Consolas"/>
+                <a:ea typeface="Consolas"/>
+                <a:cs typeface="Consolas"/>
+              </a:rPr>
+              <a:t>11</a:t>
+            </a:r>
+          </a:p>
+          <a:p xmlns:a="http://schemas.openxmlformats.org/drawingml/2006/main">
+            <a:pPr algn="r">
+              <a:lnSpc>
+                <a:spcPts val="1300"/>
+              </a:lnSpc>
+              <a:buNone/>
+              <a:defRPr sz="975" b="0">
+                <a:solidFill>
+                  <a:srgbClr val="8792A6"/>
+                </a:solidFill>
+                <a:latin typeface="Consolas"/>
+                <a:ea typeface="Consolas"/>
+                <a:cs typeface="Consolas"/>
+              </a:defRPr>
+            </a:pPr>
+            <a:r>
+              <a:rPr sz="975" b="0">
+                <a:solidFill>
+                  <a:srgbClr val="8792A6"/>
+                </a:solidFill>
+                <a:latin typeface="Consolas"/>
+                <a:ea typeface="Consolas"/>
+                <a:cs typeface="Consolas"/>
+              </a:rPr>
+              <a:t>12</a:t>
+            </a:r>
+          </a:p>
+          <a:p xmlns:a="http://schemas.openxmlformats.org/drawingml/2006/main">
+            <a:pPr algn="r">
+              <a:lnSpc>
+                <a:spcPts val="1300"/>
+              </a:lnSpc>
+              <a:buNone/>
+              <a:defRPr sz="975" b="0">
+                <a:solidFill>
+                  <a:srgbClr val="8792A6"/>
+                </a:solidFill>
+                <a:latin typeface="Consolas"/>
+                <a:ea typeface="Consolas"/>
+                <a:cs typeface="Consolas"/>
+              </a:defRPr>
+            </a:pPr>
+            <a:r>
+              <a:rPr sz="975" b="0">
+                <a:solidFill>
+                  <a:srgbClr val="8792A6"/>
+                </a:solidFill>
+                <a:latin typeface="Consolas"/>
+                <a:ea typeface="Consolas"/>
+                <a:cs typeface="Consolas"/>
+              </a:rPr>
+              <a:t>13</a:t>
+            </a:r>
+          </a:p>
         </p:txBody>
       </p:sp>
       <p:sp>
@@ -7873,6 +8008,9 @@
           <a:lstStyle xmlns:a="http://schemas.openxmlformats.org/drawingml/2006/main"/>
           <a:p xmlns:a="http://schemas.openxmlformats.org/drawingml/2006/main">
             <a:pPr>
+              <a:lnSpc>
+                <a:spcPts val="1300"/>
+              </a:lnSpc>
               <a:buNone/>
               <a:defRPr sz="1050">
                 <a:solidFill>
@@ -7900,12 +8038,44 @@
               <a:t> </a:t>
             </a:r>
             <a:r>
+              <a:rPr b="1">
+                <a:solidFill>
+                  <a:srgbClr val="0969C3"/>
+                </a:solidFill>
+              </a:rPr>
+              <a:t>sealed</a:t>
+            </a:r>
+            <a:r>
               <a:rPr b="0">
                 <a:solidFill>
+                  <a:srgbClr val="263044"/>
+                </a:solidFill>
+              </a:rPr>
+              <a:t> </a:t>
+            </a:r>
+            <a:r>
+              <a:rPr b="1">
+                <a:solidFill>
+                  <a:srgbClr val="0969C3"/>
+                </a:solidFill>
+              </a:rPr>
+              <a:t>class</a:t>
+            </a:r>
+            <a:r>
+              <a:rPr b="0">
+                <a:solidFill>
+                  <a:srgbClr val="263044"/>
+                </a:solidFill>
+              </a:rPr>
+              <a:t> </a:t>
+            </a:r>
+            <a:r>
+              <a:rPr b="0">
+                <a:solidFill>
                   <a:srgbClr val="7651D4"/>
                 </a:solidFill>
               </a:rPr>
-              <a:t>Decision</a:t>
+              <a:t>MinimumPasswordLengthControl</a:t>
             </a:r>
             <a:r>
               <a:rPr b="0">
@@ -7913,7 +8083,7 @@
                   <a:srgbClr val="263044"/>
                 </a:solidFill>
               </a:rPr>
-              <a:t> </a:t>
+              <a:t> : </a:t>
             </a:r>
             <a:r>
               <a:rPr b="0">
@@ -7921,51 +8091,14 @@
                   <a:srgbClr val="7651D4"/>
                 </a:solidFill>
               </a:rPr>
-              <a:t>Evaluate</a:t>
-            </a:r>
-            <a:r>
-              <a:rPr b="0">
-                <a:solidFill>
-                  <a:srgbClr val="263044"/>
-                </a:solidFill>
-              </a:rPr>
-              <a:t>(</a:t>
-            </a:r>
-            <a:r>
-              <a:rPr b="0">
-                <a:solidFill>
-                  <a:srgbClr val="7651D4"/>
-                </a:solidFill>
-              </a:rPr>
-              <a:t>RequestContext</a:t>
-            </a:r>
-            <a:r>
-              <a:rPr b="0">
-                <a:solidFill>
-                  <a:srgbClr val="263044"/>
-                </a:solidFill>
-              </a:rPr>
-              <a:t> ctx, </a:t>
-            </a:r>
-            <a:r>
-              <a:rPr b="0">
-                <a:solidFill>
-                  <a:srgbClr val="7651D4"/>
-                </a:solidFill>
-              </a:rPr>
-              <a:t>Policy</a:t>
-            </a:r>
-            <a:r>
-              <a:rPr b="0">
-                <a:solidFill>
-                  <a:srgbClr val="263044"/>
-                </a:solidFill>
-              </a:rPr>
-              <a:t> policy)</a:t>
+              <a:t>IConfigurationControl</a:t>
             </a:r>
           </a:p>
           <a:p xmlns:a="http://schemas.openxmlformats.org/drawingml/2006/main">
             <a:pPr>
+              <a:lnSpc>
+                <a:spcPts val="1300"/>
+              </a:lnSpc>
               <a:buNone/>
               <a:defRPr sz="1050">
                 <a:solidFill>
@@ -7987,6 +8120,9 @@
           </a:p>
           <a:p xmlns:a="http://schemas.openxmlformats.org/drawingml/2006/main">
             <a:pPr>
+              <a:lnSpc>
+                <a:spcPts val="1300"/>
+              </a:lnSpc>
               <a:buNone/>
               <a:defRPr sz="1050">
                 <a:solidFill>
@@ -8011,7 +8147,7 @@
                   <a:srgbClr val="0969C3"/>
                 </a:solidFill>
               </a:rPr>
-              <a:t>if</a:t>
+              <a:t>public</a:t>
             </a:r>
             <a:r>
               <a:rPr b="0">
@@ -8019,15 +8155,47 @@
                   <a:srgbClr val="263044"/>
                 </a:solidFill>
               </a:rPr>
-              <a:t> (!policy.</a:t>
+              <a:t> </a:t>
+            </a:r>
+            <a:r>
+              <a:rPr b="1">
+                <a:solidFill>
+                  <a:srgbClr val="0969C3"/>
+                </a:solidFill>
+              </a:rPr>
+              <a:t>const</a:t>
             </a:r>
             <a:r>
               <a:rPr b="0">
                 <a:solidFill>
+                  <a:srgbClr val="263044"/>
+                </a:solidFill>
+              </a:rPr>
+              <a:t> </a:t>
+            </a:r>
+            <a:r>
+              <a:rPr b="1">
+                <a:solidFill>
+                  <a:srgbClr val="0969C3"/>
+                </a:solidFill>
+              </a:rPr>
+              <a:t>string</a:t>
+            </a:r>
+            <a:r>
+              <a:rPr b="0">
+                <a:solidFill>
+                  <a:srgbClr val="263044"/>
+                </a:solidFill>
+              </a:rPr>
+              <a:t> </a:t>
+            </a:r>
+            <a:r>
+              <a:rPr b="0">
+                <a:solidFill>
                   <a:srgbClr val="7651D4"/>
                 </a:solidFill>
               </a:rPr>
-              <a:t>IsActiveAt</a:t>
+              <a:t>Name</a:t>
             </a:r>
             <a:r>
               <a:rPr b="0">
@@ -8035,15 +8203,15 @@
                   <a:srgbClr val="263044"/>
                 </a:solidFill>
               </a:rPr>
-              <a:t>(ctx.</a:t>
+              <a:t> = </a:t>
             </a:r>
             <a:r>
               <a:rPr b="0">
                 <a:solidFill>
-                  <a:srgbClr val="7651D4"/>
-                </a:solidFill>
-              </a:rPr>
-              <a:t>Now</a:t>
+                  <a:srgbClr val="B45309"/>
+                </a:solidFill>
+              </a:rPr>
+              <a:t>"password.minLength"</a:t>
             </a:r>
             <a:r>
               <a:rPr b="0">
@@ -8051,75 +8219,14 @@
                   <a:srgbClr val="263044"/>
                 </a:solidFill>
               </a:rPr>
-              <a:t>)) </a:t>
-            </a:r>
-            <a:r>
-              <a:rPr b="1">
-                <a:solidFill>
-                  <a:srgbClr val="0969C3"/>
-                </a:solidFill>
-              </a:rPr>
-              <a:t>return</a:t>
-            </a:r>
-            <a:r>
-              <a:rPr b="0">
-                <a:solidFill>
-                  <a:srgbClr val="263044"/>
-                </a:solidFill>
-              </a:rPr>
-              <a:t> </a:t>
-            </a:r>
-            <a:r>
-              <a:rPr b="0">
-                <a:solidFill>
-                  <a:srgbClr val="7651D4"/>
-                </a:solidFill>
-              </a:rPr>
-              <a:t>Decision</a:t>
-            </a:r>
-            <a:r>
-              <a:rPr b="0">
-                <a:solidFill>
-                  <a:srgbClr val="263044"/>
-                </a:solidFill>
-              </a:rPr>
-              <a:t>.</a:t>
-            </a:r>
-            <a:r>
-              <a:rPr b="0">
-                <a:solidFill>
-                  <a:srgbClr val="7651D4"/>
-                </a:solidFill>
-              </a:rPr>
-              <a:t>Deny</a:t>
-            </a:r>
-            <a:r>
-              <a:rPr b="0">
-                <a:solidFill>
-                  <a:srgbClr val="263044"/>
-                </a:solidFill>
-              </a:rPr>
-              <a:t>(</a:t>
-            </a:r>
-            <a:r>
-              <a:rPr b="0">
-                <a:solidFill>
-                  <a:srgbClr val="B45309"/>
-                </a:solidFill>
-              </a:rPr>
-              <a:t>"inactive"</a:t>
-            </a:r>
-            <a:r>
-              <a:rPr b="0">
-                <a:solidFill>
-                  <a:srgbClr val="263044"/>
-                </a:solidFill>
-              </a:rPr>
-              <a:t>);</a:t>
+              <a:t>;</a:t>
             </a:r>
           </a:p>
           <a:p xmlns:a="http://schemas.openxmlformats.org/drawingml/2006/main">
             <a:pPr>
+              <a:lnSpc>
+                <a:spcPts val="1300"/>
+              </a:lnSpc>
               <a:buNone/>
               <a:defRPr sz="1050">
                 <a:solidFill>
@@ -8136,107 +8243,14 @@
                   <a:srgbClr val="263044"/>
                 </a:solidFill>
               </a:rPr>
-              <a:t>    </a:t>
-            </a:r>
-            <a:r>
-              <a:rPr b="1">
-                <a:solidFill>
-                  <a:srgbClr val="0969C3"/>
-                </a:solidFill>
-              </a:rPr>
-              <a:t>if</a:t>
-            </a:r>
-            <a:r>
-              <a:rPr b="0">
-                <a:solidFill>
-                  <a:srgbClr val="263044"/>
-                </a:solidFill>
-              </a:rPr>
-              <a:t> (!policy.</a:t>
-            </a:r>
-            <a:r>
-              <a:rPr b="0">
-                <a:solidFill>
-                  <a:srgbClr val="7651D4"/>
-                </a:solidFill>
-              </a:rPr>
-              <a:t>AppliesTo</a:t>
-            </a:r>
-            <a:r>
-              <a:rPr b="0">
-                <a:solidFill>
-                  <a:srgbClr val="263044"/>
-                </a:solidFill>
-              </a:rPr>
-              <a:t>(ctx.</a:t>
-            </a:r>
-            <a:r>
-              <a:rPr b="0">
-                <a:solidFill>
-                  <a:srgbClr val="7651D4"/>
-                </a:solidFill>
-              </a:rPr>
-              <a:t>AssetType</a:t>
-            </a:r>
-            <a:r>
-              <a:rPr b="0">
-                <a:solidFill>
-                  <a:srgbClr val="263044"/>
-                </a:solidFill>
-              </a:rPr>
-              <a:t>)) </a:t>
-            </a:r>
-            <a:r>
-              <a:rPr b="1">
-                <a:solidFill>
-                  <a:srgbClr val="0969C3"/>
-                </a:solidFill>
-              </a:rPr>
-              <a:t>return</a:t>
-            </a:r>
-            <a:r>
-              <a:rPr b="0">
-                <a:solidFill>
-                  <a:srgbClr val="263044"/>
-                </a:solidFill>
-              </a:rPr>
               <a:t> </a:t>
             </a:r>
-            <a:r>
-              <a:rPr b="0">
-                <a:solidFill>
-                  <a:srgbClr val="7651D4"/>
-                </a:solidFill>
-              </a:rPr>
-              <a:t>Decision</a:t>
-            </a:r>
-            <a:r>
-              <a:rPr b="0">
-                <a:solidFill>
-                  <a:srgbClr val="263044"/>
-                </a:solidFill>
-              </a:rPr>
-              <a:t>.</a:t>
-            </a:r>
-            <a:r>
-              <a:rPr b="0">
-                <a:solidFill>
-                  <a:srgbClr val="7651D4"/>
-                </a:solidFill>
-              </a:rPr>
-              <a:t>NotApplicable</a:t>
-            </a:r>
-            <a:r>
-              <a:rPr b="0">
-                <a:solidFill>
-                  <a:srgbClr val="263044"/>
-                </a:solidFill>
-              </a:rPr>
-              <a:t>();</a:t>
-            </a:r>
           </a:p>
           <a:p xmlns:a="http://schemas.openxmlformats.org/drawingml/2006/main">
             <a:pPr>
+              <a:lnSpc>
+                <a:spcPts val="1300"/>
+              </a:lnSpc>
               <a:buNone/>
               <a:defRPr sz="1050">
                 <a:solidFill>
@@ -8261,7 +8275,7 @@
                   <a:srgbClr val="0969C3"/>
                 </a:solidFill>
               </a:rPr>
-              <a:t>if</a:t>
+              <a:t>public</a:t>
             </a:r>
             <a:r>
               <a:rPr b="0">
@@ -8269,7 +8283,7 @@
                   <a:srgbClr val="263044"/>
                 </a:solidFill>
               </a:rPr>
-              <a:t> (ctx.</a:t>
+              <a:t> </a:t>
             </a:r>
             <a:r>
               <a:rPr b="0">
@@ -8277,7 +8291,7 @@
                   <a:srgbClr val="7651D4"/>
                 </a:solidFill>
               </a:rPr>
-              <a:t>Config</a:t>
+              <a:t>ConfigurationFinding</a:t>
             </a:r>
             <a:r>
               <a:rPr b="0">
@@ -8285,7 +8299,7 @@
                   <a:srgbClr val="263044"/>
                 </a:solidFill>
               </a:rPr>
-              <a:t>.</a:t>
+              <a:t>? </a:t>
             </a:r>
             <a:r>
               <a:rPr b="0">
@@ -8293,7 +8307,7 @@
                   <a:srgbClr val="7651D4"/>
                 </a:solidFill>
               </a:rPr>
-              <a:t>Version</a:t>
+              <a:t>Check</a:t>
             </a:r>
             <a:r>
               <a:rPr b="0">
@@ -8301,27 +8315,14 @@
                   <a:srgbClr val="263044"/>
                 </a:solidFill>
               </a:rPr>
-              <a:t> != policy.</a:t>
-            </a:r>
-            <a:r>
-              <a:rPr b="0">
-                <a:solidFill>
-                  <a:srgbClr val="7651D4"/>
-                </a:solidFill>
-              </a:rPr>
-              <a:t>RequiredBaseline</a:t>
-            </a:r>
-            <a:r>
-              <a:rPr b="0">
-                <a:solidFill>
-                  <a:srgbClr val="263044"/>
-                </a:solidFill>
-              </a:rPr>
-              <a:t>)</a:t>
+              <a:t>(</a:t>
             </a:r>
           </a:p>
           <a:p xmlns:a="http://schemas.openxmlformats.org/drawingml/2006/main">
             <a:pPr>
+              <a:lnSpc>
+                <a:spcPts val="1300"/>
+              </a:lnSpc>
               <a:buNone/>
               <a:defRPr sz="1050">
                 <a:solidFill>
@@ -8341,20 +8342,20 @@
               <a:t>        </a:t>
             </a:r>
             <a:r>
-              <a:rPr b="1">
-                <a:solidFill>
-                  <a:srgbClr val="0969C3"/>
-                </a:solidFill>
-              </a:rPr>
-              <a:t>return</a:t>
-            </a:r>
-            <a:r>
               <a:rPr b="0">
                 <a:solidFill>
+                  <a:srgbClr val="7651D4"/>
+                </a:solidFill>
+              </a:rPr>
+              <a:t>SecurityBaseline</a:t>
+            </a:r>
+            <a:r>
+              <a:rPr b="0">
+                <a:solidFill>
                   <a:srgbClr val="263044"/>
                 </a:solidFill>
               </a:rPr>
-              <a:t> </a:t>
+              <a:t> baseline, </a:t>
             </a:r>
             <a:r>
               <a:rPr b="0">
@@ -8362,7 +8363,7 @@
                   <a:srgbClr val="7651D4"/>
                 </a:solidFill>
               </a:rPr>
-              <a:t>Decision</a:t>
+              <a:t>SecurityConfiguration</a:t>
             </a:r>
             <a:r>
               <a:rPr b="0">
@@ -8370,43 +8371,14 @@
                   <a:srgbClr val="263044"/>
                 </a:solidFill>
               </a:rPr>
-              <a:t>.</a:t>
-            </a:r>
-            <a:r>
-              <a:rPr b="0">
-                <a:solidFill>
-                  <a:srgbClr val="7651D4"/>
-                </a:solidFill>
-              </a:rPr>
-              <a:t>Deny</a:t>
-            </a:r>
-            <a:r>
-              <a:rPr b="0">
-                <a:solidFill>
-                  <a:srgbClr val="263044"/>
-                </a:solidFill>
-              </a:rPr>
-              <a:t>(</a:t>
-            </a:r>
-            <a:r>
-              <a:rPr b="0">
-                <a:solidFill>
-                  <a:srgbClr val="B45309"/>
-                </a:solidFill>
-              </a:rPr>
-              <a:t>"configuration_drift"</a:t>
-            </a:r>
-            <a:r>
-              <a:rPr b="0">
-                <a:solidFill>
-                  <a:srgbClr val="263044"/>
-                </a:solidFill>
-              </a:rPr>
-              <a:t>);</a:t>
+              <a:t> current) =&gt;</a:t>
             </a:r>
           </a:p>
           <a:p xmlns:a="http://schemas.openxmlformats.org/drawingml/2006/main">
             <a:pPr>
+              <a:lnSpc>
+                <a:spcPts val="1300"/>
+              </a:lnSpc>
               <a:buNone/>
               <a:defRPr sz="1050">
                 <a:solidFill>
@@ -8423,7 +8395,55 @@
                   <a:srgbClr val="263044"/>
                 </a:solidFill>
               </a:rPr>
-              <a:t>    </a:t>
+              <a:t>        current.</a:t>
+            </a:r>
+            <a:r>
+              <a:rPr b="0">
+                <a:solidFill>
+                  <a:srgbClr val="7651D4"/>
+                </a:solidFill>
+              </a:rPr>
+              <a:t>MinimumPasswordLength</a:t>
+            </a:r>
+            <a:r>
+              <a:rPr b="0">
+                <a:solidFill>
+                  <a:srgbClr val="263044"/>
+                </a:solidFill>
+              </a:rPr>
+              <a:t> &lt; baseline.</a:t>
+            </a:r>
+            <a:r>
+              <a:rPr b="0">
+                <a:solidFill>
+                  <a:srgbClr val="7651D4"/>
+                </a:solidFill>
+              </a:rPr>
+              <a:t>MinimumPasswordLength</a:t>
+            </a:r>
+          </a:p>
+          <a:p xmlns:a="http://schemas.openxmlformats.org/drawingml/2006/main">
+            <a:pPr>
+              <a:lnSpc>
+                <a:spcPts val="1300"/>
+              </a:lnSpc>
+              <a:buNone/>
+              <a:defRPr sz="1050">
+                <a:solidFill>
+                  <a:srgbClr val="263044"/>
+                </a:solidFill>
+                <a:latin typeface="Consolas"/>
+                <a:ea typeface="Consolas"/>
+                <a:cs typeface="Consolas"/>
+              </a:defRPr>
+            </a:pPr>
+            <a:r>
+              <a:rPr b="0">
+                <a:solidFill>
+                  <a:srgbClr val="263044"/>
+                </a:solidFill>
+              </a:rPr>
+              <a:t>            ? </a:t>
             </a:r>
             <a:r>
               <a:rPr b="1">
@@ -8431,7 +8451,7 @@
                   <a:srgbClr val="0969C3"/>
                 </a:solidFill>
               </a:rPr>
-              <a:t>return</a:t>
+              <a:t>new</a:t>
             </a:r>
             <a:r>
               <a:rPr b="0">
@@ -8439,15 +8459,39 @@
                   <a:srgbClr val="263044"/>
                 </a:solidFill>
               </a:rPr>
-              <a:t> policy.</a:t>
-            </a:r>
+              <a:t>(</a:t>
+            </a:r>
+          </a:p>
+          <a:p xmlns:a="http://schemas.openxmlformats.org/drawingml/2006/main">
+            <a:pPr>
+              <a:lnSpc>
+                <a:spcPts val="1300"/>
+              </a:lnSpc>
+              <a:buNone/>
+              <a:defRPr sz="1050">
+                <a:solidFill>
+                  <a:srgbClr val="263044"/>
+                </a:solidFill>
+                <a:latin typeface="Consolas"/>
+                <a:ea typeface="Consolas"/>
+                <a:cs typeface="Consolas"/>
+              </a:defRPr>
+            </a:pPr>
             <a:r>
               <a:rPr b="0">
                 <a:solidFill>
+                  <a:srgbClr val="263044"/>
+                </a:solidFill>
+              </a:rPr>
+              <a:t>                </a:t>
+            </a:r>
+            <a:r>
+              <a:rPr b="0">
+                <a:solidFill>
                   <a:srgbClr val="7651D4"/>
                 </a:solidFill>
               </a:rPr>
-              <a:t>Rule</a:t>
+              <a:t>Name</a:t>
             </a:r>
             <a:r>
               <a:rPr b="0">
@@ -8455,15 +8499,39 @@
                   <a:srgbClr val="263044"/>
                 </a:solidFill>
               </a:rPr>
-              <a:t>(ctx) ? </a:t>
-            </a:r>
+              <a:t>,</a:t>
+            </a:r>
+          </a:p>
+          <a:p xmlns:a="http://schemas.openxmlformats.org/drawingml/2006/main">
+            <a:pPr>
+              <a:lnSpc>
+                <a:spcPts val="1300"/>
+              </a:lnSpc>
+              <a:buNone/>
+              <a:defRPr sz="1050">
+                <a:solidFill>
+                  <a:srgbClr val="263044"/>
+                </a:solidFill>
+                <a:latin typeface="Consolas"/>
+                <a:ea typeface="Consolas"/>
+                <a:cs typeface="Consolas"/>
+              </a:defRPr>
+            </a:pPr>
             <a:r>
               <a:rPr b="0">
                 <a:solidFill>
+                  <a:srgbClr val="263044"/>
+                </a:solidFill>
+              </a:rPr>
+              <a:t>                baseline.</a:t>
+            </a:r>
+            <a:r>
+              <a:rPr b="0">
+                <a:solidFill>
                   <a:srgbClr val="7651D4"/>
                 </a:solidFill>
               </a:rPr>
-              <a:t>Decision</a:t>
+              <a:t>MinimumPasswordLength</a:t>
             </a:r>
             <a:r>
               <a:rPr b="0">
@@ -8479,7 +8547,7 @@
                   <a:srgbClr val="7651D4"/>
                 </a:solidFill>
               </a:rPr>
-              <a:t>Allow</a:t>
+              <a:t>ToString</a:t>
             </a:r>
             <a:r>
               <a:rPr b="0">
@@ -8487,15 +8555,39 @@
                   <a:srgbClr val="263044"/>
                 </a:solidFill>
               </a:rPr>
-              <a:t>() : </a:t>
-            </a:r>
+              <a:t>(),</a:t>
+            </a:r>
+          </a:p>
+          <a:p xmlns:a="http://schemas.openxmlformats.org/drawingml/2006/main">
+            <a:pPr>
+              <a:lnSpc>
+                <a:spcPts val="1300"/>
+              </a:lnSpc>
+              <a:buNone/>
+              <a:defRPr sz="1050">
+                <a:solidFill>
+                  <a:srgbClr val="263044"/>
+                </a:solidFill>
+                <a:latin typeface="Consolas"/>
+                <a:ea typeface="Consolas"/>
+                <a:cs typeface="Consolas"/>
+              </a:defRPr>
+            </a:pPr>
             <a:r>
               <a:rPr b="0">
                 <a:solidFill>
+                  <a:srgbClr val="263044"/>
+                </a:solidFill>
+              </a:rPr>
+              <a:t>                current.</a:t>
+            </a:r>
+            <a:r>
+              <a:rPr b="0">
+                <a:solidFill>
                   <a:srgbClr val="7651D4"/>
                 </a:solidFill>
               </a:rPr>
-              <a:t>Decision</a:t>
+              <a:t>MinimumPasswordLength</a:t>
             </a:r>
             <a:r>
               <a:rPr b="0">
@@ -8511,7 +8603,7 @@
                   <a:srgbClr val="7651D4"/>
                 </a:solidFill>
               </a:rPr>
-              <a:t>Deny</a:t>
+              <a:t>ToString</a:t>
             </a:r>
             <a:r>
               <a:rPr b="0">
@@ -8519,15 +8611,39 @@
                   <a:srgbClr val="263044"/>
                 </a:solidFill>
               </a:rPr>
-              <a:t>(</a:t>
-            </a:r>
+              <a:t>())</a:t>
+            </a:r>
+          </a:p>
+          <a:p xmlns:a="http://schemas.openxmlformats.org/drawingml/2006/main">
+            <a:pPr>
+              <a:lnSpc>
+                <a:spcPts val="1300"/>
+              </a:lnSpc>
+              <a:buNone/>
+              <a:defRPr sz="1050">
+                <a:solidFill>
+                  <a:srgbClr val="263044"/>
+                </a:solidFill>
+                <a:latin typeface="Consolas"/>
+                <a:ea typeface="Consolas"/>
+                <a:cs typeface="Consolas"/>
+              </a:defRPr>
+            </a:pPr>
             <a:r>
               <a:rPr b="0">
                 <a:solidFill>
-                  <a:srgbClr val="B45309"/>
-                </a:solidFill>
-              </a:rPr>
-              <a:t>"rule"</a:t>
+                  <a:srgbClr val="263044"/>
+                </a:solidFill>
+              </a:rPr>
+              <a:t>            : </a:t>
+            </a:r>
+            <a:r>
+              <a:rPr b="1">
+                <a:solidFill>
+                  <a:srgbClr val="0969C3"/>
+                </a:solidFill>
+              </a:rPr>
+              <a:t>null</a:t>
             </a:r>
             <a:r>
               <a:rPr b="0">
@@ -8535,11 +8651,14 @@
                   <a:srgbClr val="263044"/>
                 </a:solidFill>
               </a:rPr>
-              <a:t>);</a:t>
+              <a:t>;</a:t>
             </a:r>
           </a:p>
           <a:p xmlns:a="http://schemas.openxmlformats.org/drawingml/2006/main">
             <a:pPr>
+              <a:lnSpc>
+                <a:spcPts val="1300"/>
+              </a:lnSpc>
               <a:buNone/>
               <a:defRPr sz="1050">
                 <a:solidFill>
@@ -8870,7 +8989,7 @@
                 <a:ea typeface="Aptos"/>
                 <a:cs typeface="Aptos"/>
               </a:rPr>
-              <a:t>Одбијање је експлицитан исход са разлогом који се може тестирати и објаснити.</a:t>
+              <a:t>Одступање је експлицитан налаз са очекиваном и стварном вредношћу.</a:t>
             </a:r>
           </a:p>
         </p:txBody>
@@ -9198,7 +9317,7 @@
         <p:spPr>
           <a:xfrm xmlns:a="http://schemas.openxmlformats.org/drawingml/2006/main">
             <a:off x="666750" y="2095500"/>
-            <a:ext cx="6858000" cy="2486025"/>
+            <a:ext cx="6858000" cy="2317250"/>
           </a:xfrm>
           <a:prstGeom xmlns:a="http://schemas.openxmlformats.org/drawingml/2006/main" prst="roundRect">
             <a:avLst>
@@ -9380,7 +9499,7 @@
           <a:p xmlns:a="http://schemas.openxmlformats.org/drawingml/2006/main">
             <a:pPr algn="r">
               <a:lnSpc>
-                <a:spcPct val="100000"/>
+                <a:spcPts val="1300"/>
               </a:lnSpc>
               <a:buNone/>
               <a:defRPr sz="975" b="0">
@@ -9407,7 +9526,7 @@
           <a:p xmlns:a="http://schemas.openxmlformats.org/drawingml/2006/main">
             <a:pPr algn="r">
               <a:lnSpc>
-                <a:spcPct val="100000"/>
+                <a:spcPts val="1300"/>
               </a:lnSpc>
               <a:buNone/>
               <a:defRPr sz="975" b="0">
@@ -9434,7 +9553,7 @@
           <a:p xmlns:a="http://schemas.openxmlformats.org/drawingml/2006/main">
             <a:pPr algn="r">
               <a:lnSpc>
-                <a:spcPct val="100000"/>
+                <a:spcPts val="1300"/>
               </a:lnSpc>
               <a:buNone/>
               <a:defRPr sz="975" b="0">
@@ -9461,7 +9580,7 @@
           <a:p xmlns:a="http://schemas.openxmlformats.org/drawingml/2006/main">
             <a:pPr algn="r">
               <a:lnSpc>
-                <a:spcPct val="100000"/>
+                <a:spcPts val="1300"/>
               </a:lnSpc>
               <a:buNone/>
               <a:defRPr sz="975" b="0">
@@ -9488,7 +9607,7 @@
           <a:p xmlns:a="http://schemas.openxmlformats.org/drawingml/2006/main">
             <a:pPr algn="r">
               <a:lnSpc>
-                <a:spcPct val="100000"/>
+                <a:spcPts val="1300"/>
               </a:lnSpc>
               <a:buNone/>
               <a:defRPr sz="975" b="0">
@@ -9515,7 +9634,7 @@
           <a:p xmlns:a="http://schemas.openxmlformats.org/drawingml/2006/main">
             <a:pPr algn="r">
               <a:lnSpc>
-                <a:spcPct val="100000"/>
+                <a:spcPts val="1300"/>
               </a:lnSpc>
               <a:buNone/>
               <a:defRPr sz="975" b="0">
@@ -9542,7 +9661,7 @@
           <a:p xmlns:a="http://schemas.openxmlformats.org/drawingml/2006/main">
             <a:pPr algn="r">
               <a:lnSpc>
-                <a:spcPct val="100000"/>
+                <a:spcPts val="1300"/>
               </a:lnSpc>
               <a:buNone/>
               <a:defRPr sz="975" b="0">
@@ -9569,7 +9688,7 @@
           <a:p xmlns:a="http://schemas.openxmlformats.org/drawingml/2006/main">
             <a:pPr algn="r">
               <a:lnSpc>
-                <a:spcPct val="100000"/>
+                <a:spcPts val="1300"/>
               </a:lnSpc>
               <a:buNone/>
               <a:defRPr sz="975" b="0">
@@ -9596,7 +9715,7 @@
           <a:p xmlns:a="http://schemas.openxmlformats.org/drawingml/2006/main">
             <a:pPr algn="r">
               <a:lnSpc>
-                <a:spcPct val="100000"/>
+                <a:spcPts val="1300"/>
               </a:lnSpc>
               <a:buNone/>
               <a:defRPr sz="975" b="0">
@@ -9623,7 +9742,7 @@
           <a:p xmlns:a="http://schemas.openxmlformats.org/drawingml/2006/main">
             <a:pPr algn="r">
               <a:lnSpc>
-                <a:spcPct val="100000"/>
+                <a:spcPts val="1300"/>
               </a:lnSpc>
               <a:buNone/>
               <a:defRPr sz="975" b="0">
@@ -9647,15 +9766,49 @@
               <a:t>10</a:t>
             </a:r>
           </a:p>
-          <a:p xmlns:a="http://schemas.openxmlformats.org/drawingml/2006/main">
-            <a:pPr algn="r">
-              <a:lnSpc>
-                <a:spcPct val="100000"/>
-              </a:lnSpc>
-              <a:buNone/>
-              <a:defRPr sz="975" b="0">
-                <a:solidFill>
-                  <a:srgbClr val="8792A6"/>
+        </p:txBody>
+      </p:sp>
+      <p:sp>
+        <p:nvSpPr>
+          <p:cNvPr id="12" name="Rectangle 11">
+            <a:extLst xmlns:a="http://schemas.openxmlformats.org/drawingml/2006/main">
+              <a:ext uri="{FF2B5EF4-FFF2-40B4-BE49-F238E27FC236}">
+                <a16:creationId xmlns:a16="http://schemas.microsoft.com/office/drawing/2014/main" id="{A89EF430-4A2F-43A8-A0E8-8196FAC0E436}"/>
+              </a:ext>
+            </a:extLst>
+          </p:cNvPr>
+          <p:cNvSpPr>
+            <a:spLocks xmlns:a="http://schemas.openxmlformats.org/drawingml/2006/main" noGrp="1"/>
+          </p:cNvSpPr>
+          <p:nvPr/>
+        </p:nvSpPr>
+        <p:spPr>
+          <a:xfrm xmlns:a="http://schemas.openxmlformats.org/drawingml/2006/main">
+            <a:off x="1200150" y="2571750"/>
+            <a:ext cx="6153150" cy="3028950"/>
+          </a:xfrm>
+          <a:prstGeom xmlns:a="http://schemas.openxmlformats.org/drawingml/2006/main" prst="rect">
+            <a:avLst/>
+          </a:prstGeom>
+          <a:noFill xmlns:a="http://schemas.openxmlformats.org/drawingml/2006/main"/>
+          <a:ln xmlns:a="http://schemas.openxmlformats.org/drawingml/2006/main" w="0">
+            <a:noFill/>
+          </a:ln>
+        </p:spPr>
+        <p:txBody>
+          <a:bodyPr xmlns:a="http://schemas.openxmlformats.org/drawingml/2006/main" wrap="square" lIns="0" tIns="0" rIns="0" bIns="0" anchor="t">
+            <a:normAutofit/>
+          </a:bodyPr>
+          <a:lstStyle xmlns:a="http://schemas.openxmlformats.org/drawingml/2006/main"/>
+          <a:p xmlns:a="http://schemas.openxmlformats.org/drawingml/2006/main">
+            <a:pPr>
+              <a:lnSpc>
+                <a:spcPts val="1300"/>
+              </a:lnSpc>
+              <a:buNone/>
+              <a:defRPr sz="1050">
+                <a:solidFill>
+                  <a:srgbClr val="263044"/>
                 </a:solidFill>
                 <a:latin typeface="Consolas"/>
                 <a:ea typeface="Consolas"/>
@@ -9663,53 +9816,99 @@
               </a:defRPr>
             </a:pPr>
             <a:r>
-              <a:rPr sz="975" b="0">
-                <a:solidFill>
-                  <a:srgbClr val="8792A6"/>
+              <a:rPr b="0">
+                <a:solidFill>
+                  <a:srgbClr val="263044"/>
+                </a:solidFill>
+              </a:rPr>
+              <a:t>[</a:t>
+            </a:r>
+            <a:r>
+              <a:rPr b="0">
+                <a:solidFill>
+                  <a:srgbClr val="7651D4"/>
+                </a:solidFill>
+              </a:rPr>
+              <a:t>Test</a:t>
+            </a:r>
+            <a:r>
+              <a:rPr b="0">
+                <a:solidFill>
+                  <a:srgbClr val="263044"/>
+                </a:solidFill>
+              </a:rPr>
+              <a:t>]</a:t>
+            </a:r>
+          </a:p>
+          <a:p xmlns:a="http://schemas.openxmlformats.org/drawingml/2006/main">
+            <a:pPr>
+              <a:lnSpc>
+                <a:spcPts val="1300"/>
+              </a:lnSpc>
+              <a:buNone/>
+              <a:defRPr sz="1050">
+                <a:solidFill>
+                  <a:srgbClr val="263044"/>
                 </a:solidFill>
                 <a:latin typeface="Consolas"/>
                 <a:ea typeface="Consolas"/>
                 <a:cs typeface="Consolas"/>
-              </a:rPr>
-              <a:t>11</a:t>
-            </a:r>
-          </a:p>
-        </p:txBody>
-      </p:sp>
-      <p:sp>
-        <p:nvSpPr>
-          <p:cNvPr id="12" name="Rectangle 11">
-            <a:extLst xmlns:a="http://schemas.openxmlformats.org/drawingml/2006/main">
-              <a:ext uri="{FF2B5EF4-FFF2-40B4-BE49-F238E27FC236}">
-                <a16:creationId xmlns:a16="http://schemas.microsoft.com/office/drawing/2014/main" id="{A89EF430-4A2F-43A8-A0E8-8196FAC0E436}"/>
-              </a:ext>
-            </a:extLst>
-          </p:cNvPr>
-          <p:cNvSpPr>
-            <a:spLocks xmlns:a="http://schemas.openxmlformats.org/drawingml/2006/main" noGrp="1"/>
-          </p:cNvSpPr>
-          <p:nvPr/>
-        </p:nvSpPr>
-        <p:spPr>
-          <a:xfrm xmlns:a="http://schemas.openxmlformats.org/drawingml/2006/main">
-            <a:off x="1200150" y="2571750"/>
-            <a:ext cx="6153150" cy="3028950"/>
-          </a:xfrm>
-          <a:prstGeom xmlns:a="http://schemas.openxmlformats.org/drawingml/2006/main" prst="rect">
-            <a:avLst/>
-          </a:prstGeom>
-          <a:noFill xmlns:a="http://schemas.openxmlformats.org/drawingml/2006/main"/>
-          <a:ln xmlns:a="http://schemas.openxmlformats.org/drawingml/2006/main" w="0">
-            <a:noFill/>
-          </a:ln>
-        </p:spPr>
-        <p:txBody>
-          <a:bodyPr xmlns:a="http://schemas.openxmlformats.org/drawingml/2006/main" wrap="square" lIns="0" tIns="0" rIns="0" bIns="0" anchor="t">
-            <a:normAutofit/>
-          </a:bodyPr>
-          <a:lstStyle xmlns:a="http://schemas.openxmlformats.org/drawingml/2006/main"/>
+              </a:defRPr>
+            </a:pPr>
+            <a:r>
+              <a:rPr b="1">
+                <a:solidFill>
+                  <a:srgbClr val="0969C3"/>
+                </a:solidFill>
+              </a:rPr>
+              <a:t>public</a:t>
+            </a:r>
+            <a:r>
+              <a:rPr b="0">
+                <a:solidFill>
+                  <a:srgbClr val="263044"/>
+                </a:solidFill>
+              </a:rPr>
+              <a:t> </a:t>
+            </a:r>
+            <a:r>
+              <a:rPr b="1">
+                <a:solidFill>
+                  <a:srgbClr val="0969C3"/>
+                </a:solidFill>
+              </a:rPr>
+              <a:t>void</a:t>
+            </a:r>
+            <a:r>
+              <a:rPr b="0">
+                <a:solidFill>
+                  <a:srgbClr val="263044"/>
+                </a:solidFill>
+              </a:rPr>
+              <a:t> </a:t>
+            </a:r>
+            <a:r>
+              <a:rPr b="0">
+                <a:solidFill>
+                  <a:srgbClr val="7651D4"/>
+                </a:solidFill>
+              </a:rPr>
+              <a:t>MinimumPasswordLength_WhenShorterThanBaseline_ReportsFinding</a:t>
+            </a:r>
+            <a:r>
+              <a:rPr b="0">
+                <a:solidFill>
+                  <a:srgbClr val="263044"/>
+                </a:solidFill>
+              </a:rPr>
+              <a:t>()</a:t>
+            </a:r>
+          </a:p>
           <a:p xmlns:a="http://schemas.openxmlformats.org/drawingml/2006/main">
             <a:pPr>
+              <a:lnSpc>
+                <a:spcPts val="1300"/>
+              </a:lnSpc>
               <a:buNone/>
               <a:defRPr sz="1050">
                 <a:solidFill>
@@ -9726,27 +9925,14 @@
                   <a:srgbClr val="263044"/>
                 </a:solidFill>
               </a:rPr>
-              <a:t>[</a:t>
-            </a:r>
-            <a:r>
-              <a:rPr b="0">
-                <a:solidFill>
-                  <a:srgbClr val="7651D4"/>
-                </a:solidFill>
-              </a:rPr>
-              <a:t>Fact</a:t>
-            </a:r>
-            <a:r>
-              <a:rPr b="0">
-                <a:solidFill>
-                  <a:srgbClr val="263044"/>
-                </a:solidFill>
-              </a:rPr>
-              <a:t>]</a:t>
+              <a:t>{</a:t>
             </a:r>
           </a:p>
           <a:p xmlns:a="http://schemas.openxmlformats.org/drawingml/2006/main">
             <a:pPr>
+              <a:lnSpc>
+                <a:spcPts val="1300"/>
+              </a:lnSpc>
               <a:buNone/>
               <a:defRPr sz="1050">
                 <a:solidFill>
@@ -9758,12 +9944,20 @@
               </a:defRPr>
             </a:pPr>
             <a:r>
+              <a:rPr b="0">
+                <a:solidFill>
+                  <a:srgbClr val="263044"/>
+                </a:solidFill>
+              </a:rPr>
+              <a:t>    </a:t>
+            </a:r>
+            <a:r>
               <a:rPr b="1">
                 <a:solidFill>
                   <a:srgbClr val="0969C3"/>
                 </a:solidFill>
               </a:rPr>
-              <a:t>public</a:t>
+              <a:t>var</a:t>
             </a:r>
             <a:r>
               <a:rPr b="0">
@@ -9771,23 +9965,39 @@
                   <a:srgbClr val="263044"/>
                 </a:solidFill>
               </a:rPr>
+              <a:t> finding = </a:t>
+            </a:r>
+            <a:r>
+              <a:rPr b="1">
+                <a:solidFill>
+                  <a:srgbClr val="0969C3"/>
+                </a:solidFill>
+              </a:rPr>
+              <a:t>new</a:t>
+            </a:r>
+            <a:r>
+              <a:rPr b="0">
+                <a:solidFill>
+                  <a:srgbClr val="263044"/>
+                </a:solidFill>
+              </a:rPr>
               <a:t> </a:t>
             </a:r>
             <a:r>
-              <a:rPr b="1">
-                <a:solidFill>
-                  <a:srgbClr val="0969C3"/>
-                </a:solidFill>
-              </a:rPr>
-              <a:t>void</a:t>
-            </a:r>
-            <a:r>
               <a:rPr b="0">
                 <a:solidFill>
+                  <a:srgbClr val="7651D4"/>
+                </a:solidFill>
+              </a:rPr>
+              <a:t>MinimumPasswordLengthControl</a:t>
+            </a:r>
+            <a:r>
+              <a:rPr b="0">
+                <a:solidFill>
                   <a:srgbClr val="263044"/>
                 </a:solidFill>
               </a:rPr>
-              <a:t> </a:t>
+              <a:t>().</a:t>
             </a:r>
             <a:r>
               <a:rPr b="0">
@@ -9795,7 +10005,7 @@
                   <a:srgbClr val="7651D4"/>
                 </a:solidFill>
               </a:rPr>
-              <a:t>Drift_from_required_baseline_is_visible</a:t>
+              <a:t>Check</a:t>
             </a:r>
             <a:r>
               <a:rPr b="0">
@@ -9803,11 +10013,14 @@
                   <a:srgbClr val="263044"/>
                 </a:solidFill>
               </a:rPr>
-              <a:t>()</a:t>
+              <a:t>(</a:t>
             </a:r>
           </a:p>
           <a:p xmlns:a="http://schemas.openxmlformats.org/drawingml/2006/main">
             <a:pPr>
+              <a:lnSpc>
+                <a:spcPts val="1300"/>
+              </a:lnSpc>
               <a:buNone/>
               <a:defRPr sz="1050">
                 <a:solidFill>
@@ -9824,11 +10037,30 @@
                   <a:srgbClr val="263044"/>
                 </a:solidFill>
               </a:rPr>
-              <a:t>{</a:t>
+              <a:t>        </a:t>
+            </a:r>
+            <a:r>
+              <a:rPr b="0">
+                <a:solidFill>
+                  <a:srgbClr val="7651D4"/>
+                </a:solidFill>
+              </a:rPr>
+              <a:t>Baseline</a:t>
+            </a:r>
+            <a:r>
+              <a:rPr b="0">
+                <a:solidFill>
+                  <a:srgbClr val="263044"/>
+                </a:solidFill>
+              </a:rPr>
+              <a:t>,</a:t>
             </a:r>
           </a:p>
           <a:p xmlns:a="http://schemas.openxmlformats.org/drawingml/2006/main">
             <a:pPr>
+              <a:lnSpc>
+                <a:spcPts val="1300"/>
+              </a:lnSpc>
               <a:buNone/>
               <a:defRPr sz="1050">
                 <a:solidFill>
@@ -9845,7 +10077,7 @@
                   <a:srgbClr val="263044"/>
                 </a:solidFill>
               </a:rPr>
-              <a:t>    </a:t>
+              <a:t>        </a:t>
             </a:r>
             <a:r>
               <a:rPr b="1">
@@ -9853,7 +10085,7 @@
                   <a:srgbClr val="0969C3"/>
                 </a:solidFill>
               </a:rPr>
-              <a:t>var</a:t>
+              <a:t>new</a:t>
             </a:r>
             <a:r>
               <a:rPr b="0">
@@ -9861,7 +10093,7 @@
                   <a:srgbClr val="263044"/>
                 </a:solidFill>
               </a:rPr>
-              <a:t> ctx = </a:t>
+              <a:t> </a:t>
             </a:r>
             <a:r>
               <a:rPr b="0">
@@ -9869,7 +10101,7 @@
                   <a:srgbClr val="7651D4"/>
                 </a:solidFill>
               </a:rPr>
-              <a:t>Context</a:t>
+              <a:t>SecurityConfiguration</a:t>
             </a:r>
             <a:r>
               <a:rPr b="0">
@@ -9877,15 +10109,15 @@
                   <a:srgbClr val="263044"/>
                 </a:solidFill>
               </a:rPr>
-              <a:t>.</a:t>
+              <a:t>(</a:t>
             </a:r>
             <a:r>
               <a:rPr b="0">
                 <a:solidFill>
-                  <a:srgbClr val="7651D4"/>
-                </a:solidFill>
-              </a:rPr>
-              <a:t>WithBaseline</a:t>
+                  <a:srgbClr val="B86A09"/>
+                </a:solidFill>
+              </a:rPr>
+              <a:t>10</a:t>
             </a:r>
             <a:r>
               <a:rPr b="0">
@@ -9893,27 +10125,30 @@
                   <a:srgbClr val="263044"/>
                 </a:solidFill>
               </a:rPr>
-              <a:t>(</a:t>
+              <a:t>, </a:t>
+            </a:r>
+            <a:r>
+              <a:rPr b="1">
+                <a:solidFill>
+                  <a:srgbClr val="0969C3"/>
+                </a:solidFill>
+              </a:rPr>
+              <a:t>true</a:t>
             </a:r>
             <a:r>
               <a:rPr b="0">
                 <a:solidFill>
-                  <a:srgbClr val="B45309"/>
-                </a:solidFill>
-              </a:rPr>
-              <a:t>"api-v3"</a:t>
-            </a:r>
-            <a:r>
-              <a:rPr b="0">
-                <a:solidFill>
                   <a:srgbClr val="263044"/>
                 </a:solidFill>
               </a:rPr>
-              <a:t>);</a:t>
+              <a:t>));</a:t>
             </a:r>
           </a:p>
           <a:p xmlns:a="http://schemas.openxmlformats.org/drawingml/2006/main">
             <a:pPr>
+              <a:lnSpc>
+                <a:spcPts val="1300"/>
+              </a:lnSpc>
               <a:buNone/>
               <a:defRPr sz="1050">
                 <a:solidFill>
@@ -9930,75 +10165,14 @@
                   <a:srgbClr val="263044"/>
                 </a:solidFill>
               </a:rPr>
-              <a:t>    </a:t>
-            </a:r>
-            <a:r>
-              <a:rPr b="1">
-                <a:solidFill>
-                  <a:srgbClr val="0969C3"/>
-                </a:solidFill>
-              </a:rPr>
-              <a:t>var</a:t>
-            </a:r>
-            <a:r>
-              <a:rPr b="0">
-                <a:solidFill>
-                  <a:srgbClr val="263044"/>
-                </a:solidFill>
-              </a:rPr>
-              <a:t> policy = </a:t>
-            </a:r>
-            <a:r>
-              <a:rPr b="0">
-                <a:solidFill>
-                  <a:srgbClr val="7651D4"/>
-                </a:solidFill>
-              </a:rPr>
-              <a:t>Policy</a:t>
-            </a:r>
-            <a:r>
-              <a:rPr b="0">
-                <a:solidFill>
-                  <a:srgbClr val="263044"/>
-                </a:solidFill>
-              </a:rPr>
-              <a:t>.</a:t>
-            </a:r>
-            <a:r>
-              <a:rPr b="0">
-                <a:solidFill>
-                  <a:srgbClr val="7651D4"/>
-                </a:solidFill>
-              </a:rPr>
-              <a:t>RequiresBaseline</a:t>
-            </a:r>
-            <a:r>
-              <a:rPr b="0">
-                <a:solidFill>
-                  <a:srgbClr val="263044"/>
-                </a:solidFill>
-              </a:rPr>
-              <a:t>(</a:t>
-            </a:r>
-            <a:r>
-              <a:rPr b="0">
-                <a:solidFill>
-                  <a:srgbClr val="B45309"/>
-                </a:solidFill>
-              </a:rPr>
-              <a:t>"api-v4"</a:t>
-            </a:r>
-            <a:r>
-              <a:rPr b="0">
-                <a:solidFill>
-                  <a:srgbClr val="263044"/>
-                </a:solidFill>
-              </a:rPr>
-              <a:t>);</a:t>
+              <a:t> </a:t>
             </a:r>
           </a:p>
           <a:p xmlns:a="http://schemas.openxmlformats.org/drawingml/2006/main">
             <a:pPr>
+              <a:lnSpc>
+                <a:spcPts val="1300"/>
+              </a:lnSpc>
               <a:buNone/>
               <a:defRPr sz="1050">
                 <a:solidFill>
@@ -10009,14 +10183,116 @@
                 <a:cs typeface="Consolas"/>
               </a:defRPr>
             </a:pPr>
-            <a:endParaRPr b="0">
-              <a:solidFill>
-                <a:srgbClr val="263044"/>
-              </a:solidFill>
-            </a:endParaRPr>
+            <a:r>
+              <a:rPr b="0">
+                <a:solidFill>
+                  <a:srgbClr val="263044"/>
+                </a:solidFill>
+              </a:rPr>
+              <a:t>    </a:t>
+            </a:r>
+            <a:r>
+              <a:rPr b="0">
+                <a:solidFill>
+                  <a:srgbClr val="7651D4"/>
+                </a:solidFill>
+              </a:rPr>
+              <a:t>Assert</a:t>
+            </a:r>
+            <a:r>
+              <a:rPr b="0">
+                <a:solidFill>
+                  <a:srgbClr val="263044"/>
+                </a:solidFill>
+              </a:rPr>
+              <a:t>.</a:t>
+            </a:r>
+            <a:r>
+              <a:rPr b="0">
+                <a:solidFill>
+                  <a:srgbClr val="7651D4"/>
+                </a:solidFill>
+              </a:rPr>
+              <a:t>That</a:t>
+            </a:r>
+            <a:r>
+              <a:rPr b="0">
+                <a:solidFill>
+                  <a:srgbClr val="263044"/>
+                </a:solidFill>
+              </a:rPr>
+              <a:t>(finding, </a:t>
+            </a:r>
+            <a:r>
+              <a:rPr b="0">
+                <a:solidFill>
+                  <a:srgbClr val="7651D4"/>
+                </a:solidFill>
+              </a:rPr>
+              <a:t>Is</a:t>
+            </a:r>
+            <a:r>
+              <a:rPr b="0">
+                <a:solidFill>
+                  <a:srgbClr val="263044"/>
+                </a:solidFill>
+              </a:rPr>
+              <a:t>.</a:t>
+            </a:r>
+            <a:r>
+              <a:rPr b="0">
+                <a:solidFill>
+                  <a:srgbClr val="7651D4"/>
+                </a:solidFill>
+              </a:rPr>
+              <a:t>EqualTo</a:t>
+            </a:r>
+            <a:r>
+              <a:rPr b="0">
+                <a:solidFill>
+                  <a:srgbClr val="263044"/>
+                </a:solidFill>
+              </a:rPr>
+              <a:t>(</a:t>
+            </a:r>
+            <a:r>
+              <a:rPr b="1">
+                <a:solidFill>
+                  <a:srgbClr val="0969C3"/>
+                </a:solidFill>
+              </a:rPr>
+              <a:t>new</a:t>
+            </a:r>
+            <a:r>
+              <a:rPr b="0">
+                <a:solidFill>
+                  <a:srgbClr val="263044"/>
+                </a:solidFill>
+              </a:rPr>
+              <a:t> </a:t>
+            </a:r>
+            <a:r>
+              <a:rPr b="0">
+                <a:solidFill>
+                  <a:srgbClr val="7651D4"/>
+                </a:solidFill>
+              </a:rPr>
+              <a:t>ConfigurationFinding</a:t>
+            </a:r>
+            <a:r>
+              <a:rPr b="0">
+                <a:solidFill>
+                  <a:srgbClr val="263044"/>
+                </a:solidFill>
+              </a:rPr>
+              <a:t>(</a:t>
+            </a:r>
           </a:p>
           <a:p xmlns:a="http://schemas.openxmlformats.org/drawingml/2006/main">
             <a:pPr>
+              <a:lnSpc>
+                <a:spcPts val="1300"/>
+              </a:lnSpc>
               <a:buNone/>
               <a:defRPr sz="1050">
                 <a:solidFill>
@@ -10033,23 +10309,23 @@
                   <a:srgbClr val="263044"/>
                 </a:solidFill>
               </a:rPr>
-              <a:t>    </a:t>
-            </a:r>
-            <a:r>
-              <a:rPr b="1">
-                <a:solidFill>
-                  <a:srgbClr val="0969C3"/>
-                </a:solidFill>
-              </a:rPr>
-              <a:t>var</a:t>
+              <a:t>        </a:t>
             </a:r>
             <a:r>
               <a:rPr b="0">
                 <a:solidFill>
+                  <a:srgbClr val="7651D4"/>
+                </a:solidFill>
+              </a:rPr>
+              <a:t>MinimumPasswordLengthControl</a:t>
+            </a:r>
+            <a:r>
+              <a:rPr b="0">
+                <a:solidFill>
                   <a:srgbClr val="263044"/>
                 </a:solidFill>
               </a:rPr>
-              <a:t> result = evaluator.</a:t>
+              <a:t>.</a:t>
             </a:r>
             <a:r>
               <a:rPr b="0">
@@ -10057,7 +10333,7 @@
                   <a:srgbClr val="7651D4"/>
                 </a:solidFill>
               </a:rPr>
-              <a:t>Evaluate</a:t>
+              <a:t>Name</a:t>
             </a:r>
             <a:r>
               <a:rPr b="0">
@@ -10065,199 +10341,46 @@
                   <a:srgbClr val="263044"/>
                 </a:solidFill>
               </a:rPr>
-              <a:t>(ctx, policy);</a:t>
+              <a:t>, </a:t>
+            </a:r>
+            <a:r>
+              <a:rPr b="0">
+                <a:solidFill>
+                  <a:srgbClr val="B45309"/>
+                </a:solidFill>
+              </a:rPr>
+              <a:t>"14"</a:t>
+            </a:r>
+            <a:r>
+              <a:rPr b="0">
+                <a:solidFill>
+                  <a:srgbClr val="263044"/>
+                </a:solidFill>
+              </a:rPr>
+              <a:t>, </a:t>
+            </a:r>
+            <a:r>
+              <a:rPr b="0">
+                <a:solidFill>
+                  <a:srgbClr val="B45309"/>
+                </a:solidFill>
+              </a:rPr>
+              <a:t>"10"</a:t>
+            </a:r>
+            <a:r>
+              <a:rPr b="0">
+                <a:solidFill>
+                  <a:srgbClr val="263044"/>
+                </a:solidFill>
+              </a:rPr>
+              <a:t>)));</a:t>
             </a:r>
           </a:p>
           <a:p xmlns:a="http://schemas.openxmlformats.org/drawingml/2006/main">
             <a:pPr>
-              <a:buNone/>
-              <a:defRPr sz="1050">
-                <a:solidFill>
-                  <a:srgbClr val="263044"/>
-                </a:solidFill>
-                <a:latin typeface="Consolas"/>
-                <a:ea typeface="Consolas"/>
-                <a:cs typeface="Consolas"/>
-              </a:defRPr>
-            </a:pPr>
-            <a:endParaRPr b="0">
-              <a:solidFill>
-                <a:srgbClr val="263044"/>
-              </a:solidFill>
-            </a:endParaRPr>
-          </a:p>
-          <a:p xmlns:a="http://schemas.openxmlformats.org/drawingml/2006/main">
-            <a:pPr>
-              <a:buNone/>
-              <a:defRPr sz="1050">
-                <a:solidFill>
-                  <a:srgbClr val="263044"/>
-                </a:solidFill>
-                <a:latin typeface="Consolas"/>
-                <a:ea typeface="Consolas"/>
-                <a:cs typeface="Consolas"/>
-              </a:defRPr>
-            </a:pPr>
-            <a:r>
-              <a:rPr b="0">
-                <a:solidFill>
-                  <a:srgbClr val="263044"/>
-                </a:solidFill>
-              </a:rPr>
-              <a:t>    result.</a:t>
-            </a:r>
-            <a:r>
-              <a:rPr b="0">
-                <a:solidFill>
-                  <a:srgbClr val="7651D4"/>
-                </a:solidFill>
-              </a:rPr>
-              <a:t>Reason</a:t>
-            </a:r>
-            <a:r>
-              <a:rPr b="0">
-                <a:solidFill>
-                  <a:srgbClr val="263044"/>
-                </a:solidFill>
-              </a:rPr>
-              <a:t>.</a:t>
-            </a:r>
-            <a:r>
-              <a:rPr b="0">
-                <a:solidFill>
-                  <a:srgbClr val="7651D4"/>
-                </a:solidFill>
-              </a:rPr>
-              <a:t>Should</a:t>
-            </a:r>
-            <a:r>
-              <a:rPr b="0">
-                <a:solidFill>
-                  <a:srgbClr val="263044"/>
-                </a:solidFill>
-              </a:rPr>
-              <a:t>().</a:t>
-            </a:r>
-            <a:r>
-              <a:rPr b="0">
-                <a:solidFill>
-                  <a:srgbClr val="7651D4"/>
-                </a:solidFill>
-              </a:rPr>
-              <a:t>Be</a:t>
-            </a:r>
-            <a:r>
-              <a:rPr b="0">
-                <a:solidFill>
-                  <a:srgbClr val="263044"/>
-                </a:solidFill>
-              </a:rPr>
-              <a:t>(</a:t>
-            </a:r>
-            <a:r>
-              <a:rPr b="0">
-                <a:solidFill>
-                  <a:srgbClr val="B45309"/>
-                </a:solidFill>
-              </a:rPr>
-              <a:t>"configuration_drift"</a:t>
-            </a:r>
-            <a:r>
-              <a:rPr b="0">
-                <a:solidFill>
-                  <a:srgbClr val="263044"/>
-                </a:solidFill>
-              </a:rPr>
-              <a:t>);</a:t>
-            </a:r>
-          </a:p>
-          <a:p xmlns:a="http://schemas.openxmlformats.org/drawingml/2006/main">
-            <a:pPr>
-              <a:buNone/>
-              <a:defRPr sz="1050">
-                <a:solidFill>
-                  <a:srgbClr val="263044"/>
-                </a:solidFill>
-                <a:latin typeface="Consolas"/>
-                <a:ea typeface="Consolas"/>
-                <a:cs typeface="Consolas"/>
-              </a:defRPr>
-            </a:pPr>
-            <a:r>
-              <a:rPr b="0">
-                <a:solidFill>
-                  <a:srgbClr val="263044"/>
-                </a:solidFill>
-              </a:rPr>
-              <a:t>    metrics.</a:t>
-            </a:r>
-            <a:r>
-              <a:rPr b="0">
-                <a:solidFill>
-                  <a:srgbClr val="7651D4"/>
-                </a:solidFill>
-              </a:rPr>
-              <a:t>DriftDetected</a:t>
-            </a:r>
-            <a:r>
-              <a:rPr b="0">
-                <a:solidFill>
-                  <a:srgbClr val="263044"/>
-                </a:solidFill>
-              </a:rPr>
-              <a:t>.</a:t>
-            </a:r>
-            <a:r>
-              <a:rPr b="0">
-                <a:solidFill>
-                  <a:srgbClr val="7651D4"/>
-                </a:solidFill>
-              </a:rPr>
-              <a:t>Should</a:t>
-            </a:r>
-            <a:r>
-              <a:rPr b="0">
-                <a:solidFill>
-                  <a:srgbClr val="263044"/>
-                </a:solidFill>
-              </a:rPr>
-              <a:t>().</a:t>
-            </a:r>
-            <a:r>
-              <a:rPr b="0">
-                <a:solidFill>
-                  <a:srgbClr val="7651D4"/>
-                </a:solidFill>
-              </a:rPr>
-              <a:t>Be</a:t>
-            </a:r>
-            <a:r>
-              <a:rPr b="0">
-                <a:solidFill>
-                  <a:srgbClr val="263044"/>
-                </a:solidFill>
-              </a:rPr>
-              <a:t>(</a:t>
-            </a:r>
-            <a:r>
-              <a:rPr b="0">
-                <a:solidFill>
-                  <a:srgbClr val="B86A09"/>
-                </a:solidFill>
-              </a:rPr>
-              <a:t>1</a:t>
-            </a:r>
-            <a:r>
-              <a:rPr b="0">
-                <a:solidFill>
-                  <a:srgbClr val="263044"/>
-                </a:solidFill>
-              </a:rPr>
-              <a:t>);</a:t>
-            </a:r>
-          </a:p>
-          <a:p xmlns:a="http://schemas.openxmlformats.org/drawingml/2006/main">
-            <a:pPr>
+              <a:lnSpc>
+                <a:spcPts val="1300"/>
+              </a:lnSpc>
               <a:buNone/>
               <a:defRPr sz="1050">
                 <a:solidFill>
@@ -10431,7 +10554,7 @@
                 <a:ea typeface="Aptos"/>
                 <a:cs typeface="Aptos"/>
               </a:rPr>
-              <a:t>Тест проверава вредност, разлог одбијања и сигнал који указује на одступање.</a:t>
+              <a:t>Тест проверава назив контроле, очекивану и стварну вредност одступања.</a:t>
             </a:r>
           </a:p>
         </p:txBody>
@@ -10588,7 +10711,7 @@
                 <a:ea typeface="Aptos"/>
                 <a:cs typeface="Aptos"/>
               </a:rPr>
-              <a:t>Тест мења једну чињеницу и очекује јасан, стабилан разлог одбијања.</a:t>
+              <a:t>Тест мења једну вредност конфигурације и очекује један јасан налаз.</a:t>
             </a:r>
           </a:p>
         </p:txBody>
@@ -11098,7 +11221,7 @@
           <a:p xmlns:a="http://schemas.openxmlformats.org/drawingml/2006/main">
             <a:pPr algn="r">
               <a:lnSpc>
-                <a:spcPct val="100000"/>
+                <a:spcPts val="1300"/>
               </a:lnSpc>
               <a:buNone/>
               <a:defRPr sz="1050" b="0">
@@ -11125,7 +11248,7 @@
           <a:p xmlns:a="http://schemas.openxmlformats.org/drawingml/2006/main">
             <a:pPr algn="r">
               <a:lnSpc>
-                <a:spcPct val="100000"/>
+                <a:spcPts val="1300"/>
               </a:lnSpc>
               <a:buNone/>
               <a:defRPr sz="1050" b="0">
@@ -11152,7 +11275,7 @@
           <a:p xmlns:a="http://schemas.openxmlformats.org/drawingml/2006/main">
             <a:pPr algn="r">
               <a:lnSpc>
-                <a:spcPct val="100000"/>
+                <a:spcPts val="1300"/>
               </a:lnSpc>
               <a:buNone/>
               <a:defRPr sz="1050" b="0">
@@ -11179,7 +11302,7 @@
           <a:p xmlns:a="http://schemas.openxmlformats.org/drawingml/2006/main">
             <a:pPr algn="r">
               <a:lnSpc>
-                <a:spcPct val="100000"/>
+                <a:spcPts val="1300"/>
               </a:lnSpc>
               <a:buNone/>
               <a:defRPr sz="1050" b="0">
@@ -11206,7 +11329,7 @@
           <a:p xmlns:a="http://schemas.openxmlformats.org/drawingml/2006/main">
             <a:pPr algn="r">
               <a:lnSpc>
-                <a:spcPct val="100000"/>
+                <a:spcPts val="1300"/>
               </a:lnSpc>
               <a:buNone/>
               <a:defRPr sz="1050" b="0">
@@ -11233,7 +11356,7 @@
           <a:p xmlns:a="http://schemas.openxmlformats.org/drawingml/2006/main">
             <a:pPr algn="r">
               <a:lnSpc>
-                <a:spcPct val="100000"/>
+                <a:spcPts val="1300"/>
               </a:lnSpc>
               <a:buNone/>
               <a:defRPr sz="1050" b="0">
@@ -11260,7 +11383,7 @@
           <a:p xmlns:a="http://schemas.openxmlformats.org/drawingml/2006/main">
             <a:pPr algn="r">
               <a:lnSpc>
-                <a:spcPct val="100000"/>
+                <a:spcPts val="1300"/>
               </a:lnSpc>
               <a:buNone/>
               <a:defRPr sz="1050" b="0">
@@ -11287,7 +11410,7 @@
           <a:p xmlns:a="http://schemas.openxmlformats.org/drawingml/2006/main">
             <a:pPr algn="r">
               <a:lnSpc>
-                <a:spcPct val="100000"/>
+                <a:spcPts val="1300"/>
               </a:lnSpc>
               <a:buNone/>
               <a:defRPr sz="1050" b="0">
@@ -11347,6 +11470,9 @@
           <a:lstStyle xmlns:a="http://schemas.openxmlformats.org/drawingml/2006/main"/>
           <a:p xmlns:a="http://schemas.openxmlformats.org/drawingml/2006/main">
             <a:pPr>
+              <a:lnSpc>
+                <a:spcPts val="1300"/>
+              </a:lnSpc>
               <a:buNone/>
               <a:defRPr sz="1125">
                 <a:solidFill>
@@ -11368,6 +11494,9 @@
           </a:p>
           <a:p xmlns:a="http://schemas.openxmlformats.org/drawingml/2006/main">
             <a:pPr>
+              <a:lnSpc>
+                <a:spcPts val="1300"/>
+              </a:lnSpc>
               <a:buNone/>
               <a:defRPr sz="1125">
                 <a:solidFill>
@@ -11421,6 +11550,9 @@
           </a:p>
           <a:p xmlns:a="http://schemas.openxmlformats.org/drawingml/2006/main">
             <a:pPr>
+              <a:lnSpc>
+                <a:spcPts val="1300"/>
+              </a:lnSpc>
               <a:buNone/>
               <a:defRPr sz="1125">
                 <a:solidFill>
@@ -11474,6 +11606,9 @@
           </a:p>
           <a:p xmlns:a="http://schemas.openxmlformats.org/drawingml/2006/main">
             <a:pPr>
+              <a:lnSpc>
+                <a:spcPts val="1300"/>
+              </a:lnSpc>
               <a:buNone/>
               <a:defRPr sz="1125">
                 <a:solidFill>
@@ -11527,6 +11662,9 @@
           </a:p>
           <a:p xmlns:a="http://schemas.openxmlformats.org/drawingml/2006/main">
             <a:pPr>
+              <a:lnSpc>
+                <a:spcPts val="1300"/>
+              </a:lnSpc>
               <a:buNone/>
               <a:defRPr sz="1125">
                 <a:solidFill>
@@ -11580,6 +11718,9 @@
           </a:p>
           <a:p xmlns:a="http://schemas.openxmlformats.org/drawingml/2006/main">
             <a:pPr>
+              <a:lnSpc>
+                <a:spcPts val="1300"/>
+              </a:lnSpc>
               <a:buNone/>
               <a:defRPr sz="1125">
                 <a:solidFill>
@@ -11633,6 +11774,9 @@
           </a:p>
           <a:p xmlns:a="http://schemas.openxmlformats.org/drawingml/2006/main">
             <a:pPr>
+              <a:lnSpc>
+                <a:spcPts val="1300"/>
+              </a:lnSpc>
               <a:buNone/>
               <a:defRPr sz="1125">
                 <a:solidFill>
@@ -11678,6 +11822,9 @@
           </a:p>
           <a:p xmlns:a="http://schemas.openxmlformats.org/drawingml/2006/main">
             <a:pPr>
+              <a:lnSpc>
+                <a:spcPts val="1300"/>
+              </a:lnSpc>
               <a:buNone/>
               <a:defRPr sz="1125">
                 <a:solidFill>
@@ -21007,7 +21154,7 @@
                 <a:ea typeface="Aptos"/>
                 <a:cs typeface="Aptos"/>
               </a:rPr>
-              <a:t>Нова верзија политике чува разлог и контекст у коме је претходна одлука била исправна.</a:t>
+              <a:t>Политика изражава намеру: шта мора да важи, за кога и од ког датума.</a:t>
             </a:r>
           </a:p>
         </p:txBody>
@@ -21231,7 +21378,7 @@
                 <a:ea typeface="Aptos"/>
                 <a:cs typeface="Aptos"/>
               </a:rPr>
-              <a:t>Политика описује намеру и важење, док конфигурација чува вредности којима се та намера примењује у окружењу.</a:t>
+              <a:t>Објављена верзија политике се не мења накнадно; нова намера постаје нова верзија.</a:t>
             </a:r>
           </a:p>
         </p:txBody>
@@ -21455,7 +21602,7 @@
                 <a:ea typeface="Aptos"/>
                 <a:cs typeface="Aptos"/>
               </a:rPr>
-              <a:t>Конфликт политика решава се унапред договореним правилом, често рестриктивнијом одлуком.</a:t>
+              <a:t>Свака верзија чува разлог и контекст промене, па се стара одлука може објаснити.</a:t>
             </a:r>
           </a:p>
         </p:txBody>
@@ -21766,7 +21913,7 @@
                 <a:ea typeface="Aptos"/>
                 <a:cs typeface="Aptos"/>
               </a:rPr>
-              <a:t>Које безбедносно правило би требало да буде засебан, читљив артефакт у вашој целини и који доказ показује да ради?</a:t>
+              <a:t>Које безбедносно правило у вашој целини мора имати власника, верзију и датум важења?</a:t>
             </a:r>
           </a:p>
         </p:txBody>
@@ -22235,7 +22382,7 @@
                 <a:ea typeface="Aptos"/>
                 <a:cs typeface="Aptos"/>
               </a:rPr>
-              <a:t>Конфигурациона вредност има власника, значење и очекивани опсег.</a:t>
+              <a:t>Конфигурациона вредност је конкретно стање система и има власника и очекивану вредност.</a:t>
             </a:r>
           </a:p>
         </p:txBody>
@@ -22459,7 +22606,7 @@
                 <a:ea typeface="Aptos"/>
                 <a:cs typeface="Aptos"/>
               </a:rPr>
-              <a:t>Свака промена која утиче на одлуку има власника, датум и јасан разлог.</a:t>
+              <a:t>Референтна конфигурација одређује најмању дозвољену строгост; строже подешавање није одступање.</a:t>
             </a:r>
           </a:p>
         </p:txBody>
@@ -22683,7 +22830,7 @@
                 <a:ea typeface="Aptos"/>
                 <a:cs typeface="Aptos"/>
               </a:rPr>
-              <a:t>Конфигурација не мења смисао политике без видљивог процеса одобравања.</a:t>
+              <a:t>Свака промена вредности оставља траг: ко ју је променио, када и зашто.</a:t>
             </a:r>
           </a:p>
         </p:txBody>
@@ -22994,7 +23141,7 @@
                 <a:ea typeface="Aptos"/>
                 <a:cs typeface="Aptos"/>
               </a:rPr>
-              <a:t>Које безбедносно правило би требало да буде засебан, читљив артефакт у вашој целини и који доказ показује да ради?</a:t>
+              <a:t>Које подешавање у вашем систему тихо слаби заштиту ако се промени?</a:t>
             </a:r>
           </a:p>
         </p:txBody>
@@ -23463,7 +23610,7 @@
                 <a:ea typeface="Aptos"/>
                 <a:cs typeface="Aptos"/>
               </a:rPr>
-              <a:t>Корелациони идентификатор повезује један безбедносни ток кроз слојеве система.</a:t>
+              <a:t>Контрола пореди стварно стање са референтним и за свако правило даје један јасан исход.</a:t>
             </a:r>
           </a:p>
         </p:txBody>
@@ -23687,7 +23834,7 @@
                 <a:ea typeface="Aptos"/>
                 <a:cs typeface="Aptos"/>
               </a:rPr>
-              <a:t>Лог, метрика или тест дају доказ да систем ради према активном правилу, а не само да је правило записано.</a:t>
+              <a:t>Нова контрола се додаје као нова класа, без измене постојећих провера.</a:t>
             </a:r>
           </a:p>
         </p:txBody>
@@ -23911,7 +24058,7 @@
                 <a:ea typeface="Aptos"/>
                 <a:cs typeface="Aptos"/>
               </a:rPr>
-              <a:t>Безбедносна контрола има власника и очекивани доказ, иначе нико не прати да ли је престала да ради.</a:t>
+              <a:t>Налаз садржи назив контроле, очекивану вредност и стварну вредност.</a:t>
             </a:r>
           </a:p>
         </p:txBody>
@@ -24222,7 +24369,7 @@
                 <a:ea typeface="Aptos"/>
                 <a:cs typeface="Aptos"/>
               </a:rPr>
-              <a:t>Које безбедносно правило би требало да буде засебан, читљив артефакт у вашој целини и који доказ показује да ради?</a:t>
+              <a:t>Која контрола у вашој целини проверава да правило заиста важи?</a:t>
             </a:r>
           </a:p>
         </p:txBody>
@@ -24691,7 +24838,7 @@
                 <a:ea typeface="Aptos"/>
                 <a:cs typeface="Aptos"/>
               </a:rPr>
-              <a:t>Конфликт политика решава се унапред договореним правилом, често рестриктивнијом одлуком.</a:t>
+              <a:t>Доказ показује стваран исход, а не само да је правило записано.</a:t>
             </a:r>
           </a:p>
         </p:txBody>
@@ -24915,7 +25062,7 @@
                 <a:ea typeface="Aptos"/>
                 <a:cs typeface="Aptos"/>
               </a:rPr>
-              <a:t>Конфигурација не мења смисао политике без видљивог процеса одобравања.</a:t>
+              <a:t>Корелациони идентификатор повезује налаз са провером која га је произвела.</a:t>
             </a:r>
           </a:p>
         </p:txBody>
@@ -25139,7 +25286,7 @@
                 <a:ea typeface="Aptos"/>
                 <a:cs typeface="Aptos"/>
               </a:rPr>
-              <a:t>Безбедносна контрола има власника и очекивани доказ, иначе нико не прати да ли је престала да ради.</a:t>
+              <a:t>Тест са одступањем и тест без одступања заједно доказују да контрола ради.</a:t>
             </a:r>
           </a:p>
         </p:txBody>
@@ -25450,7 +25597,7 @@
                 <a:ea typeface="Aptos"/>
                 <a:cs typeface="Aptos"/>
               </a:rPr>
-              <a:t>Које безбедносно правило би требало да буде засебан, читљив артефакт у вашој целини и који доказ показује да ради?</a:t>
+              <a:t>Којим записом бисте показали да је одступање откривено и када?</a:t>
             </a:r>
           </a:p>
         </p:txBody>
